--- a/Presentations/AVR Live Class 1.pptx
+++ b/Presentations/AVR Live Class 1.pptx
@@ -289,401 +289,29 @@
 </p:presentation>
 </file>
 
-<file path=ppt/revisionInfo.xml><?xml version="1.0" encoding="utf-8"?>
-<p1510:revInfo xmlns:a="http://schemas.openxmlformats.org/drawingml/2006/main" xmlns:r="http://schemas.openxmlformats.org/officeDocument/2006/relationships" xmlns:p1510="http://schemas.microsoft.com/office/powerpoint/2015/10/main">
-  <p1510:revLst>
-    <p1510:client id="{7CA8E155-B939-49A2-B258-5F667E7F83F2}" v="12" dt="2025-09-01T13:21:36.996"/>
-  </p1510:revLst>
-</p1510:revInfo>
-</file>
-
 <file path=ppt/changesInfos/changesInfo1.xml><?xml version="1.0" encoding="utf-8"?>
 <pc:chgInfo xmlns:a="http://schemas.openxmlformats.org/drawingml/2006/main" xmlns:r="http://schemas.openxmlformats.org/officeDocument/2006/relationships" xmlns:ac="http://schemas.microsoft.com/office/drawing/2013/main/command" xmlns:pc="http://schemas.microsoft.com/office/powerpoint/2013/main/command">
   <pc:docChgLst>
-    <pc:chgData name="Sreejith Rajan" userId="ec11bca0e4bee75f" providerId="LiveId" clId="{7CA8E155-B939-49A2-B258-5F667E7F83F2}"/>
-    <pc:docChg chg="undo custSel addSld delSld modSld">
-      <pc:chgData name="Sreejith Rajan" userId="ec11bca0e4bee75f" providerId="LiveId" clId="{7CA8E155-B939-49A2-B258-5F667E7F83F2}" dt="2025-09-01T14:39:21.139" v="738"/>
+    <pc:chgData name="Sreejith Rajan" userId="ec11bca0e4bee75f" providerId="LiveId" clId="{7B4F392D-EAB3-4CE7-903E-F84869825F47}"/>
+    <pc:docChg chg="custSel modSld">
+      <pc:chgData name="Sreejith Rajan" userId="ec11bca0e4bee75f" providerId="LiveId" clId="{7B4F392D-EAB3-4CE7-903E-F84869825F47}" dt="2025-11-11T14:19:47.717" v="0" actId="478"/>
       <pc:docMkLst>
         <pc:docMk/>
       </pc:docMkLst>
-      <pc:sldChg chg="modSp mod">
-        <pc:chgData name="Sreejith Rajan" userId="ec11bca0e4bee75f" providerId="LiveId" clId="{7CA8E155-B939-49A2-B258-5F667E7F83F2}" dt="2025-09-01T12:41:09.203" v="40" actId="20577"/>
-        <pc:sldMkLst>
-          <pc:docMk/>
-          <pc:sldMk cId="0" sldId="256"/>
-        </pc:sldMkLst>
-        <pc:spChg chg="mod">
-          <ac:chgData name="Sreejith Rajan" userId="ec11bca0e4bee75f" providerId="LiveId" clId="{7CA8E155-B939-49A2-B258-5F667E7F83F2}" dt="2025-09-01T12:41:09.203" v="40" actId="20577"/>
-          <ac:spMkLst>
-            <pc:docMk/>
-            <pc:sldMk cId="0" sldId="256"/>
-            <ac:spMk id="33" creationId="{00000000-0000-0000-0000-000000000000}"/>
-          </ac:spMkLst>
-        </pc:spChg>
-      </pc:sldChg>
-      <pc:sldChg chg="modSp mod">
-        <pc:chgData name="Sreejith Rajan" userId="ec11bca0e4bee75f" providerId="LiveId" clId="{7CA8E155-B939-49A2-B258-5F667E7F83F2}" dt="2025-09-01T12:55:08.536" v="150" actId="20577"/>
-        <pc:sldMkLst>
-          <pc:docMk/>
-          <pc:sldMk cId="0" sldId="258"/>
-        </pc:sldMkLst>
-        <pc:spChg chg="mod">
-          <ac:chgData name="Sreejith Rajan" userId="ec11bca0e4bee75f" providerId="LiveId" clId="{7CA8E155-B939-49A2-B258-5F667E7F83F2}" dt="2025-09-01T12:51:57.061" v="52" actId="20577"/>
-          <ac:spMkLst>
-            <pc:docMk/>
-            <pc:sldMk cId="0" sldId="258"/>
-            <ac:spMk id="46" creationId="{00000000-0000-0000-0000-000000000000}"/>
-          </ac:spMkLst>
-        </pc:spChg>
-        <pc:spChg chg="mod">
-          <ac:chgData name="Sreejith Rajan" userId="ec11bca0e4bee75f" providerId="LiveId" clId="{7CA8E155-B939-49A2-B258-5F667E7F83F2}" dt="2025-09-01T12:55:08.536" v="150" actId="20577"/>
-          <ac:spMkLst>
-            <pc:docMk/>
-            <pc:sldMk cId="0" sldId="258"/>
-            <ac:spMk id="47" creationId="{00000000-0000-0000-0000-000000000000}"/>
-          </ac:spMkLst>
-        </pc:spChg>
-      </pc:sldChg>
-      <pc:sldChg chg="addSp delSp modSp mod">
-        <pc:chgData name="Sreejith Rajan" userId="ec11bca0e4bee75f" providerId="LiveId" clId="{7CA8E155-B939-49A2-B258-5F667E7F83F2}" dt="2025-09-01T12:56:08.409" v="165" actId="20577"/>
-        <pc:sldMkLst>
-          <pc:docMk/>
-          <pc:sldMk cId="0" sldId="259"/>
-        </pc:sldMkLst>
-        <pc:spChg chg="add">
-          <ac:chgData name="Sreejith Rajan" userId="ec11bca0e4bee75f" providerId="LiveId" clId="{7CA8E155-B939-49A2-B258-5F667E7F83F2}" dt="2025-09-01T12:55:41.923" v="152"/>
-          <ac:spMkLst>
-            <pc:docMk/>
-            <pc:sldMk cId="0" sldId="259"/>
-            <ac:spMk id="2" creationId="{6372555B-349B-9564-B7F7-6A9296460C27}"/>
-          </ac:spMkLst>
-        </pc:spChg>
-        <pc:spChg chg="mod">
-          <ac:chgData name="Sreejith Rajan" userId="ec11bca0e4bee75f" providerId="LiveId" clId="{7CA8E155-B939-49A2-B258-5F667E7F83F2}" dt="2025-09-01T12:55:47.497" v="159" actId="20577"/>
-          <ac:spMkLst>
-            <pc:docMk/>
-            <pc:sldMk cId="0" sldId="259"/>
-            <ac:spMk id="54" creationId="{00000000-0000-0000-0000-000000000000}"/>
-          </ac:spMkLst>
-        </pc:spChg>
-        <pc:spChg chg="mod">
-          <ac:chgData name="Sreejith Rajan" userId="ec11bca0e4bee75f" providerId="LiveId" clId="{7CA8E155-B939-49A2-B258-5F667E7F83F2}" dt="2025-09-01T12:56:08.409" v="165" actId="20577"/>
-          <ac:spMkLst>
-            <pc:docMk/>
-            <pc:sldMk cId="0" sldId="259"/>
-            <ac:spMk id="55" creationId="{00000000-0000-0000-0000-000000000000}"/>
-          </ac:spMkLst>
-        </pc:spChg>
-        <pc:picChg chg="del">
-          <ac:chgData name="Sreejith Rajan" userId="ec11bca0e4bee75f" providerId="LiveId" clId="{7CA8E155-B939-49A2-B258-5F667E7F83F2}" dt="2025-09-01T12:55:49.734" v="160" actId="478"/>
-          <ac:picMkLst>
-            <pc:docMk/>
-            <pc:sldMk cId="0" sldId="259"/>
-            <ac:picMk id="4" creationId="{3A81DE37-286A-A14D-D6CC-1391B7B00701}"/>
-          </ac:picMkLst>
-        </pc:picChg>
-      </pc:sldChg>
-      <pc:sldChg chg="delSp modSp mod">
-        <pc:chgData name="Sreejith Rajan" userId="ec11bca0e4bee75f" providerId="LiveId" clId="{7CA8E155-B939-49A2-B258-5F667E7F83F2}" dt="2025-09-01T13:09:36.295" v="247" actId="20577"/>
-        <pc:sldMkLst>
-          <pc:docMk/>
-          <pc:sldMk cId="1389626550" sldId="267"/>
-        </pc:sldMkLst>
-        <pc:spChg chg="mod">
-          <ac:chgData name="Sreejith Rajan" userId="ec11bca0e4bee75f" providerId="LiveId" clId="{7CA8E155-B939-49A2-B258-5F667E7F83F2}" dt="2025-09-01T13:08:01.744" v="227" actId="20577"/>
-          <ac:spMkLst>
-            <pc:docMk/>
-            <pc:sldMk cId="1389626550" sldId="267"/>
-            <ac:spMk id="54" creationId="{505CB07C-62A7-0E4C-6035-03E85C6DF01E}"/>
-          </ac:spMkLst>
-        </pc:spChg>
-        <pc:spChg chg="mod">
-          <ac:chgData name="Sreejith Rajan" userId="ec11bca0e4bee75f" providerId="LiveId" clId="{7CA8E155-B939-49A2-B258-5F667E7F83F2}" dt="2025-09-01T13:09:36.295" v="247" actId="20577"/>
-          <ac:spMkLst>
-            <pc:docMk/>
-            <pc:sldMk cId="1389626550" sldId="267"/>
-            <ac:spMk id="55" creationId="{93441B73-3EF0-0031-34E8-88A822C7B502}"/>
-          </ac:spMkLst>
-        </pc:spChg>
-        <pc:picChg chg="del">
-          <ac:chgData name="Sreejith Rajan" userId="ec11bca0e4bee75f" providerId="LiveId" clId="{7CA8E155-B939-49A2-B258-5F667E7F83F2}" dt="2025-09-01T13:08:03.808" v="228" actId="478"/>
-          <ac:picMkLst>
-            <pc:docMk/>
-            <pc:sldMk cId="1389626550" sldId="267"/>
-            <ac:picMk id="4" creationId="{C49C1DF3-C6D7-3FBE-C7BE-60CD0077F615}"/>
-          </ac:picMkLst>
-        </pc:picChg>
-      </pc:sldChg>
-      <pc:sldChg chg="delSp modSp del mod">
-        <pc:chgData name="Sreejith Rajan" userId="ec11bca0e4bee75f" providerId="LiveId" clId="{7CA8E155-B939-49A2-B258-5F667E7F83F2}" dt="2025-09-01T13:13:41.916" v="280" actId="47"/>
-        <pc:sldMkLst>
-          <pc:docMk/>
-          <pc:sldMk cId="2517281589" sldId="274"/>
-        </pc:sldMkLst>
-        <pc:spChg chg="mod">
-          <ac:chgData name="Sreejith Rajan" userId="ec11bca0e4bee75f" providerId="LiveId" clId="{7CA8E155-B939-49A2-B258-5F667E7F83F2}" dt="2025-09-01T13:13:26.767" v="278" actId="20577"/>
-          <ac:spMkLst>
-            <pc:docMk/>
-            <pc:sldMk cId="2517281589" sldId="274"/>
-            <ac:spMk id="54" creationId="{F5C408E8-BC47-B2C2-7462-C129AFFB4F4F}"/>
-          </ac:spMkLst>
-        </pc:spChg>
-        <pc:graphicFrameChg chg="del">
-          <ac:chgData name="Sreejith Rajan" userId="ec11bca0e4bee75f" providerId="LiveId" clId="{7CA8E155-B939-49A2-B258-5F667E7F83F2}" dt="2025-09-01T13:13:32.558" v="279" actId="478"/>
-          <ac:graphicFrameMkLst>
-            <pc:docMk/>
-            <pc:sldMk cId="2517281589" sldId="274"/>
-            <ac:graphicFrameMk id="2" creationId="{6784F7DE-F1A1-5DDC-884F-697FC92978BF}"/>
-          </ac:graphicFrameMkLst>
-        </pc:graphicFrameChg>
-      </pc:sldChg>
-      <pc:sldChg chg="delSp modSp mod">
-        <pc:chgData name="Sreejith Rajan" userId="ec11bca0e4bee75f" providerId="LiveId" clId="{7CA8E155-B939-49A2-B258-5F667E7F83F2}" dt="2025-09-01T12:57:52.460" v="187" actId="207"/>
-        <pc:sldMkLst>
-          <pc:docMk/>
-          <pc:sldMk cId="280470215" sldId="281"/>
-        </pc:sldMkLst>
-        <pc:spChg chg="mod">
-          <ac:chgData name="Sreejith Rajan" userId="ec11bca0e4bee75f" providerId="LiveId" clId="{7CA8E155-B939-49A2-B258-5F667E7F83F2}" dt="2025-09-01T12:57:18.202" v="181" actId="20577"/>
-          <ac:spMkLst>
-            <pc:docMk/>
-            <pc:sldMk cId="280470215" sldId="281"/>
-            <ac:spMk id="54" creationId="{6B15B2B1-49F5-2797-EA94-FD8176141DEB}"/>
-          </ac:spMkLst>
-        </pc:spChg>
-        <pc:spChg chg="mod">
-          <ac:chgData name="Sreejith Rajan" userId="ec11bca0e4bee75f" providerId="LiveId" clId="{7CA8E155-B939-49A2-B258-5F667E7F83F2}" dt="2025-09-01T12:57:52.460" v="187" actId="207"/>
-          <ac:spMkLst>
-            <pc:docMk/>
-            <pc:sldMk cId="280470215" sldId="281"/>
-            <ac:spMk id="55" creationId="{3F769B9D-F2C9-ED4B-5F86-A4260FE8E786}"/>
-          </ac:spMkLst>
-        </pc:spChg>
-        <pc:picChg chg="del">
-          <ac:chgData name="Sreejith Rajan" userId="ec11bca0e4bee75f" providerId="LiveId" clId="{7CA8E155-B939-49A2-B258-5F667E7F83F2}" dt="2025-09-01T12:57:20.804" v="182" actId="478"/>
-          <ac:picMkLst>
-            <pc:docMk/>
-            <pc:sldMk cId="280470215" sldId="281"/>
-            <ac:picMk id="3" creationId="{6E27D02C-9EF0-9F41-DE1F-15F25C243C86}"/>
-          </ac:picMkLst>
-        </pc:picChg>
-      </pc:sldChg>
-      <pc:sldChg chg="addSp delSp modSp mod">
-        <pc:chgData name="Sreejith Rajan" userId="ec11bca0e4bee75f" providerId="LiveId" clId="{7CA8E155-B939-49A2-B258-5F667E7F83F2}" dt="2025-09-01T13:07:46.235" v="213" actId="20577"/>
-        <pc:sldMkLst>
-          <pc:docMk/>
-          <pc:sldMk cId="682396941" sldId="282"/>
-        </pc:sldMkLst>
-        <pc:spChg chg="mod">
-          <ac:chgData name="Sreejith Rajan" userId="ec11bca0e4bee75f" providerId="LiveId" clId="{7CA8E155-B939-49A2-B258-5F667E7F83F2}" dt="2025-09-01T13:07:46.235" v="213" actId="20577"/>
-          <ac:spMkLst>
-            <pc:docMk/>
-            <pc:sldMk cId="682396941" sldId="282"/>
-            <ac:spMk id="54" creationId="{9283C473-62FC-4E7F-0537-4DF7FFC8FAA1}"/>
-          </ac:spMkLst>
-        </pc:spChg>
-        <pc:spChg chg="mod">
-          <ac:chgData name="Sreejith Rajan" userId="ec11bca0e4bee75f" providerId="LiveId" clId="{7CA8E155-B939-49A2-B258-5F667E7F83F2}" dt="2025-09-01T13:00:07.774" v="203" actId="20577"/>
-          <ac:spMkLst>
-            <pc:docMk/>
-            <pc:sldMk cId="682396941" sldId="282"/>
-            <ac:spMk id="55" creationId="{CDBEBA7C-FD1D-B57A-1E7D-B25370E3E214}"/>
-          </ac:spMkLst>
-        </pc:spChg>
-        <pc:picChg chg="add mod">
-          <ac:chgData name="Sreejith Rajan" userId="ec11bca0e4bee75f" providerId="LiveId" clId="{7CA8E155-B939-49A2-B258-5F667E7F83F2}" dt="2025-09-01T13:07:19.801" v="209" actId="1076"/>
-          <ac:picMkLst>
-            <pc:docMk/>
-            <pc:sldMk cId="682396941" sldId="282"/>
-            <ac:picMk id="3" creationId="{9F5A7CFA-A38A-45B0-C0D8-08D5047DB2AE}"/>
-          </ac:picMkLst>
-        </pc:picChg>
-        <pc:picChg chg="del">
-          <ac:chgData name="Sreejith Rajan" userId="ec11bca0e4bee75f" providerId="LiveId" clId="{7CA8E155-B939-49A2-B258-5F667E7F83F2}" dt="2025-09-01T13:00:03.558" v="202" actId="478"/>
-          <ac:picMkLst>
-            <pc:docMk/>
-            <pc:sldMk cId="682396941" sldId="282"/>
-            <ac:picMk id="6" creationId="{475F8FF4-FAFB-9274-50A5-C9C0753EA1BE}"/>
-          </ac:picMkLst>
-        </pc:picChg>
-      </pc:sldChg>
-      <pc:sldChg chg="addSp delSp modSp mod">
-        <pc:chgData name="Sreejith Rajan" userId="ec11bca0e4bee75f" providerId="LiveId" clId="{7CA8E155-B939-49A2-B258-5F667E7F83F2}" dt="2025-09-01T13:13:17.314" v="272" actId="20577"/>
+      <pc:sldChg chg="delSp mod">
+        <pc:chgData name="Sreejith Rajan" userId="ec11bca0e4bee75f" providerId="LiveId" clId="{7B4F392D-EAB3-4CE7-903E-F84869825F47}" dt="2025-11-11T14:19:47.717" v="0" actId="478"/>
         <pc:sldMkLst>
           <pc:docMk/>
           <pc:sldMk cId="3362503428" sldId="283"/>
         </pc:sldMkLst>
-        <pc:spChg chg="add mod">
-          <ac:chgData name="Sreejith Rajan" userId="ec11bca0e4bee75f" providerId="LiveId" clId="{7CA8E155-B939-49A2-B258-5F667E7F83F2}" dt="2025-09-01T13:11:25.102" v="260"/>
-          <ac:spMkLst>
+        <pc:cxnChg chg="del">
+          <ac:chgData name="Sreejith Rajan" userId="ec11bca0e4bee75f" providerId="LiveId" clId="{7B4F392D-EAB3-4CE7-903E-F84869825F47}" dt="2025-11-11T14:19:47.717" v="0" actId="478"/>
+          <ac:cxnSpMkLst>
             <pc:docMk/>
             <pc:sldMk cId="3362503428" sldId="283"/>
-            <ac:spMk id="2" creationId="{07AE6C67-968D-2FEB-2952-64A090DC9C31}"/>
-          </ac:spMkLst>
-        </pc:spChg>
-        <pc:spChg chg="mod">
-          <ac:chgData name="Sreejith Rajan" userId="ec11bca0e4bee75f" providerId="LiveId" clId="{7CA8E155-B939-49A2-B258-5F667E7F83F2}" dt="2025-09-01T13:11:19.739" v="258" actId="20577"/>
-          <ac:spMkLst>
-            <pc:docMk/>
-            <pc:sldMk cId="3362503428" sldId="283"/>
-            <ac:spMk id="54" creationId="{165450FA-9AB0-DAAA-8787-5819DF6E52EE}"/>
-          </ac:spMkLst>
-        </pc:spChg>
-        <pc:spChg chg="add del mod">
-          <ac:chgData name="Sreejith Rajan" userId="ec11bca0e4bee75f" providerId="LiveId" clId="{7CA8E155-B939-49A2-B258-5F667E7F83F2}" dt="2025-09-01T13:13:17.314" v="272" actId="20577"/>
-          <ac:spMkLst>
-            <pc:docMk/>
-            <pc:sldMk cId="3362503428" sldId="283"/>
-            <ac:spMk id="55" creationId="{22BC745A-16A2-15E8-2595-E18634E1D9CE}"/>
-          </ac:spMkLst>
-        </pc:spChg>
-        <pc:picChg chg="del">
-          <ac:chgData name="Sreejith Rajan" userId="ec11bca0e4bee75f" providerId="LiveId" clId="{7CA8E155-B939-49A2-B258-5F667E7F83F2}" dt="2025-09-01T13:11:11.836" v="248" actId="478"/>
-          <ac:picMkLst>
-            <pc:docMk/>
-            <pc:sldMk cId="3362503428" sldId="283"/>
-            <ac:picMk id="3" creationId="{F7648779-8BF8-78D3-9138-28544F501A87}"/>
-          </ac:picMkLst>
-        </pc:picChg>
-      </pc:sldChg>
-      <pc:sldChg chg="delSp modSp mod">
-        <pc:chgData name="Sreejith Rajan" userId="ec11bca0e4bee75f" providerId="LiveId" clId="{7CA8E155-B939-49A2-B258-5F667E7F83F2}" dt="2025-09-01T13:15:12.557" v="344" actId="20577"/>
-        <pc:sldMkLst>
-          <pc:docMk/>
-          <pc:sldMk cId="3896615428" sldId="284"/>
-        </pc:sldMkLst>
-        <pc:spChg chg="mod">
-          <ac:chgData name="Sreejith Rajan" userId="ec11bca0e4bee75f" providerId="LiveId" clId="{7CA8E155-B939-49A2-B258-5F667E7F83F2}" dt="2025-09-01T13:15:12.557" v="344" actId="20577"/>
-          <ac:spMkLst>
-            <pc:docMk/>
-            <pc:sldMk cId="3896615428" sldId="284"/>
-            <ac:spMk id="54" creationId="{BC4D53D3-3CC7-8ED7-B381-879570B9B3A8}"/>
-          </ac:spMkLst>
-        </pc:spChg>
-        <pc:spChg chg="mod">
-          <ac:chgData name="Sreejith Rajan" userId="ec11bca0e4bee75f" providerId="LiveId" clId="{7CA8E155-B939-49A2-B258-5F667E7F83F2}" dt="2025-09-01T13:14:45.008" v="332" actId="20577"/>
-          <ac:spMkLst>
-            <pc:docMk/>
-            <pc:sldMk cId="3896615428" sldId="284"/>
-            <ac:spMk id="55" creationId="{15A23119-03B0-4084-F3A2-71E24E49BC9C}"/>
-          </ac:spMkLst>
-        </pc:spChg>
-        <pc:cxnChg chg="del">
-          <ac:chgData name="Sreejith Rajan" userId="ec11bca0e4bee75f" providerId="LiveId" clId="{7CA8E155-B939-49A2-B258-5F667E7F83F2}" dt="2025-09-01T13:14:26.866" v="305" actId="478"/>
-          <ac:cxnSpMkLst>
-            <pc:docMk/>
-            <pc:sldMk cId="3896615428" sldId="284"/>
-            <ac:cxnSpMk id="5" creationId="{A7244A1C-6CBF-CF3F-3BEE-6B52CC1637D7}"/>
+            <ac:cxnSpMk id="5" creationId="{5FA940B4-60B1-C71C-1017-06860D68A9DF}"/>
           </ac:cxnSpMkLst>
         </pc:cxnChg>
-      </pc:sldChg>
-      <pc:sldChg chg="addSp modSp add mod">
-        <pc:chgData name="Sreejith Rajan" userId="ec11bca0e4bee75f" providerId="LiveId" clId="{7CA8E155-B939-49A2-B258-5F667E7F83F2}" dt="2025-09-01T13:21:58.159" v="365" actId="1076"/>
-        <pc:sldMkLst>
-          <pc:docMk/>
-          <pc:sldMk cId="2768999598" sldId="285"/>
-        </pc:sldMkLst>
-        <pc:spChg chg="mod">
-          <ac:chgData name="Sreejith Rajan" userId="ec11bca0e4bee75f" providerId="LiveId" clId="{7CA8E155-B939-49A2-B258-5F667E7F83F2}" dt="2025-09-01T13:15:31.332" v="346" actId="6549"/>
-          <ac:spMkLst>
-            <pc:docMk/>
-            <pc:sldMk cId="2768999598" sldId="285"/>
-            <ac:spMk id="55" creationId="{6BEB0E42-D1CA-59A5-9488-2502CA7BE06C}"/>
-          </ac:spMkLst>
-        </pc:spChg>
-        <pc:picChg chg="add mod">
-          <ac:chgData name="Sreejith Rajan" userId="ec11bca0e4bee75f" providerId="LiveId" clId="{7CA8E155-B939-49A2-B258-5F667E7F83F2}" dt="2025-09-01T13:19:22.064" v="349" actId="1076"/>
-          <ac:picMkLst>
-            <pc:docMk/>
-            <pc:sldMk cId="2768999598" sldId="285"/>
-            <ac:picMk id="3" creationId="{F049E54F-32FF-A872-DFAD-A13C2BC8A69F}"/>
-          </ac:picMkLst>
-        </pc:picChg>
-        <pc:picChg chg="add mod">
-          <ac:chgData name="Sreejith Rajan" userId="ec11bca0e4bee75f" providerId="LiveId" clId="{7CA8E155-B939-49A2-B258-5F667E7F83F2}" dt="2025-09-01T13:21:18.169" v="357" actId="14100"/>
-          <ac:picMkLst>
-            <pc:docMk/>
-            <pc:sldMk cId="2768999598" sldId="285"/>
-            <ac:picMk id="5" creationId="{1D4DB7B7-8B39-AB5C-99C4-470C262646B3}"/>
-          </ac:picMkLst>
-        </pc:picChg>
-        <pc:picChg chg="add mod">
-          <ac:chgData name="Sreejith Rajan" userId="ec11bca0e4bee75f" providerId="LiveId" clId="{7CA8E155-B939-49A2-B258-5F667E7F83F2}" dt="2025-09-01T13:21:58.159" v="365" actId="1076"/>
-          <ac:picMkLst>
-            <pc:docMk/>
-            <pc:sldMk cId="2768999598" sldId="285"/>
-            <ac:picMk id="9" creationId="{4E656B9C-8D8D-3826-C97D-DB27E2D7542A}"/>
-          </ac:picMkLst>
-        </pc:picChg>
-      </pc:sldChg>
-      <pc:sldChg chg="new del">
-        <pc:chgData name="Sreejith Rajan" userId="ec11bca0e4bee75f" providerId="LiveId" clId="{7CA8E155-B939-49A2-B258-5F667E7F83F2}" dt="2025-09-01T13:28:35.039" v="367" actId="47"/>
-        <pc:sldMkLst>
-          <pc:docMk/>
-          <pc:sldMk cId="1073535821" sldId="286"/>
-        </pc:sldMkLst>
-      </pc:sldChg>
-      <pc:sldChg chg="delSp modSp add mod">
-        <pc:chgData name="Sreejith Rajan" userId="ec11bca0e4bee75f" providerId="LiveId" clId="{7CA8E155-B939-49A2-B258-5F667E7F83F2}" dt="2025-09-01T14:39:21.139" v="738"/>
-        <pc:sldMkLst>
-          <pc:docMk/>
-          <pc:sldMk cId="1488398723" sldId="286"/>
-        </pc:sldMkLst>
-        <pc:spChg chg="del mod">
-          <ac:chgData name="Sreejith Rajan" userId="ec11bca0e4bee75f" providerId="LiveId" clId="{7CA8E155-B939-49A2-B258-5F667E7F83F2}" dt="2025-09-01T14:39:21.139" v="738"/>
-          <ac:spMkLst>
-            <pc:docMk/>
-            <pc:sldMk cId="1488398723" sldId="286"/>
-            <ac:spMk id="7" creationId="{89264089-564C-F2EF-9B9A-72AF60E66C02}"/>
-          </ac:spMkLst>
-        </pc:spChg>
-        <pc:spChg chg="mod">
-          <ac:chgData name="Sreejith Rajan" userId="ec11bca0e4bee75f" providerId="LiveId" clId="{7CA8E155-B939-49A2-B258-5F667E7F83F2}" dt="2025-09-01T13:29:03.591" v="390" actId="20577"/>
-          <ac:spMkLst>
-            <pc:docMk/>
-            <pc:sldMk cId="1488398723" sldId="286"/>
-            <ac:spMk id="54" creationId="{D6A271FB-F06E-A094-1264-BE3F39E98C88}"/>
-          </ac:spMkLst>
-        </pc:spChg>
-        <pc:spChg chg="mod">
-          <ac:chgData name="Sreejith Rajan" userId="ec11bca0e4bee75f" providerId="LiveId" clId="{7CA8E155-B939-49A2-B258-5F667E7F83F2}" dt="2025-09-01T14:25:23.987" v="736" actId="207"/>
-          <ac:spMkLst>
-            <pc:docMk/>
-            <pc:sldMk cId="1488398723" sldId="286"/>
-            <ac:spMk id="55" creationId="{E31F05FC-C44B-CD53-A530-278FD5640965}"/>
-          </ac:spMkLst>
-        </pc:spChg>
-        <pc:picChg chg="del">
-          <ac:chgData name="Sreejith Rajan" userId="ec11bca0e4bee75f" providerId="LiveId" clId="{7CA8E155-B939-49A2-B258-5F667E7F83F2}" dt="2025-09-01T13:29:06.198" v="391" actId="478"/>
-          <ac:picMkLst>
-            <pc:docMk/>
-            <pc:sldMk cId="1488398723" sldId="286"/>
-            <ac:picMk id="3" creationId="{94D3831E-F35B-B93F-E9C3-2B4BCC382E08}"/>
-          </ac:picMkLst>
-        </pc:picChg>
-        <pc:picChg chg="del">
-          <ac:chgData name="Sreejith Rajan" userId="ec11bca0e4bee75f" providerId="LiveId" clId="{7CA8E155-B939-49A2-B258-5F667E7F83F2}" dt="2025-09-01T13:29:08.385" v="392" actId="478"/>
-          <ac:picMkLst>
-            <pc:docMk/>
-            <pc:sldMk cId="1488398723" sldId="286"/>
-            <ac:picMk id="5" creationId="{1EFD5C79-467D-2276-1FCB-A394B18E034F}"/>
-          </ac:picMkLst>
-        </pc:picChg>
-        <pc:picChg chg="del">
-          <ac:chgData name="Sreejith Rajan" userId="ec11bca0e4bee75f" providerId="LiveId" clId="{7CA8E155-B939-49A2-B258-5F667E7F83F2}" dt="2025-09-01T13:29:10.454" v="393" actId="478"/>
-          <ac:picMkLst>
-            <pc:docMk/>
-            <pc:sldMk cId="1488398723" sldId="286"/>
-            <ac:picMk id="9" creationId="{635362DA-17D7-4E53-D257-C0F999F1BBDD}"/>
-          </ac:picMkLst>
-        </pc:picChg>
-      </pc:sldChg>
-      <pc:sldChg chg="new del">
-        <pc:chgData name="Sreejith Rajan" userId="ec11bca0e4bee75f" providerId="LiveId" clId="{7CA8E155-B939-49A2-B258-5F667E7F83F2}" dt="2025-09-01T13:28:42.025" v="369" actId="680"/>
-        <pc:sldMkLst>
-          <pc:docMk/>
-          <pc:sldMk cId="3982304584" sldId="286"/>
-        </pc:sldMkLst>
       </pc:sldChg>
     </pc:docChg>
   </pc:docChgLst>
@@ -7587,47 +7215,6 @@
           </a:p>
         </p:txBody>
       </p:sp>
-      <p:cxnSp>
-        <p:nvCxnSpPr>
-          <p:cNvPr id="5" name="Straight Connector 4">
-            <a:extLst>
-              <a:ext uri="{FF2B5EF4-FFF2-40B4-BE49-F238E27FC236}">
-                <a16:creationId xmlns:a16="http://schemas.microsoft.com/office/drawing/2014/main" id="{5FA940B4-60B1-C71C-1017-06860D68A9DF}"/>
-              </a:ext>
-            </a:extLst>
-          </p:cNvPr>
-          <p:cNvCxnSpPr/>
-          <p:nvPr/>
-        </p:nvCxnSpPr>
-        <p:spPr>
-          <a:xfrm>
-            <a:off x="4959350" y="2946400"/>
-            <a:ext cx="368300" cy="0"/>
-          </a:xfrm>
-          <a:prstGeom prst="line">
-            <a:avLst/>
-          </a:prstGeom>
-          <a:ln w="22225">
-            <a:solidFill>
-              <a:schemeClr val="bg1"/>
-            </a:solidFill>
-          </a:ln>
-        </p:spPr>
-        <p:style>
-          <a:lnRef idx="1">
-            <a:schemeClr val="accent1"/>
-          </a:lnRef>
-          <a:fillRef idx="0">
-            <a:schemeClr val="accent1"/>
-          </a:fillRef>
-          <a:effectRef idx="0">
-            <a:schemeClr val="accent1"/>
-          </a:effectRef>
-          <a:fontRef idx="minor">
-            <a:schemeClr val="tx1"/>
-          </a:fontRef>
-        </p:style>
-      </p:cxnSp>
       <p:sp>
         <p:nvSpPr>
           <p:cNvPr id="6" name="TextBox 5">
